--- a/docs/presentacion.pptx
+++ b/docs/presentacion.pptx
@@ -18,8 +18,7 @@
     <p:sldId id="266" r:id="rId12"/>
     <p:sldId id="267" r:id="rId13"/>
     <p:sldId id="268" r:id="rId14"/>
-    <p:sldId id="269" r:id="rId15"/>
-    <p:sldId id="270" r:id="rId16"/>
+    <p:sldId id="270" r:id="rId15"/>
   </p:sldIdLst>
   <p:sldSz cx="12192000" cy="6858000"/>
   <p:notesSz cx="6858000" cy="9144000"/>
@@ -3200,13 +3199,13 @@
           <a:p>
             <a:pPr algn="ctr"/>
             <a:r>
-              <a:rPr sz="1050" b="1">
+              <a:rPr sz="1050" b="1" dirty="0">
                 <a:solidFill>
                   <a:srgbClr val="FFFFFF"/>
                 </a:solidFill>
                 <a:latin typeface="Helvetica Neue"/>
               </a:rPr>
-              <a:t>MOMENTO 1</a:t>
+              <a:t>MOENTO 1</a:t>
             </a:r>
           </a:p>
         </p:txBody>
@@ -3255,7 +3254,7 @@
           <a:p>
             <a:pPr algn="ctr"/>
             <a:r>
-              <a:rPr sz="1050" b="1">
+              <a:rPr sz="1050" b="1" dirty="0">
                 <a:solidFill>
                   <a:srgbClr val="4338CA"/>
                 </a:solidFill>
@@ -8966,21 +8965,21 @@
         </p:nvSpPr>
         <p:spPr>
           <a:xfrm>
-            <a:off x="731520" y="475488"/>
-            <a:ext cx="10728655" cy="228600"/>
-          </a:xfrm>
-          <a:prstGeom prst="rect">
-            <a:avLst/>
-          </a:prstGeom>
-          <a:noFill/>
-        </p:spPr>
-        <p:txBody>
-          <a:bodyPr wrap="square" lIns="0" tIns="0" rIns="0" bIns="0">
-            <a:spAutoFit/>
-          </a:bodyPr>
-          <a:lstStyle/>
-          <a:p>
-            <a:pPr algn="l">
+            <a:off x="731520" y="1280160"/>
+            <a:ext cx="10728655" cy="274320"/>
+          </a:xfrm>
+          <a:prstGeom prst="rect">
+            <a:avLst/>
+          </a:prstGeom>
+          <a:noFill/>
+        </p:spPr>
+        <p:txBody>
+          <a:bodyPr wrap="square" lIns="0" tIns="0" rIns="0" bIns="0">
+            <a:spAutoFit/>
+          </a:bodyPr>
+          <a:lstStyle/>
+          <a:p>
+            <a:pPr algn="ctr">
               <a:lnSpc>
                 <a:spcPct val="110000"/>
               </a:lnSpc>
@@ -8989,13 +8988,13 @@
               </a:spcAft>
             </a:pPr>
             <a:r>
-              <a:rPr sz="1050" b="1">
+              <a:rPr sz="1100" b="1">
                 <a:solidFill>
                   <a:srgbClr val="4338CA"/>
                 </a:solidFill>
                 <a:latin typeface="Helvetica Neue"/>
               </a:rPr>
-              <a:t>SUSTENTACIÓN</a:t>
+              <a:t>REPOSITORIO</a:t>
             </a:r>
           </a:p>
         </p:txBody>
@@ -9008,7 +9007,7 @@
         </p:nvSpPr>
         <p:spPr>
           <a:xfrm>
-            <a:off x="731520" y="749808"/>
+            <a:off x="731520" y="1645920"/>
             <a:ext cx="10728655" cy="548640"/>
           </a:xfrm>
           <a:prstGeom prst="rect">
@@ -9022,7 +9021,7 @@
           </a:bodyPr>
           <a:lstStyle/>
           <a:p>
-            <a:pPr algn="l">
+            <a:pPr algn="ctr">
               <a:lnSpc>
                 <a:spcPct val="110000"/>
               </a:lnSpc>
@@ -9031,155 +9030,27 @@
               </a:spcAft>
             </a:pPr>
             <a:r>
-              <a:rPr sz="3100" b="1">
+              <a:rPr sz="3200" b="1">
                 <a:solidFill>
                   <a:srgbClr val="21252D"/>
                 </a:solidFill>
-                <a:latin typeface="Helvetica Neue"/>
-              </a:rPr>
-              <a:t>Preguntas que esperamos</a:t>
-            </a:r>
-          </a:p>
-        </p:txBody>
-      </p:sp>
-      <p:sp>
-        <p:nvSpPr>
-          <p:cNvPr id="5" name="TextBox 4"/>
-          <p:cNvSpPr txBox="1"/>
-          <p:nvPr/>
-        </p:nvSpPr>
-        <p:spPr>
-          <a:xfrm>
-            <a:off x="10362895" y="457200"/>
-            <a:ext cx="1097280" cy="365760"/>
-          </a:xfrm>
-          <a:prstGeom prst="rect">
-            <a:avLst/>
-          </a:prstGeom>
-          <a:noFill/>
-        </p:spPr>
-        <p:txBody>
-          <a:bodyPr wrap="square" lIns="0" tIns="0" rIns="0" bIns="0">
-            <a:spAutoFit/>
-          </a:bodyPr>
-          <a:lstStyle/>
-          <a:p>
-            <a:pPr algn="r">
-              <a:lnSpc>
-                <a:spcPct val="110000"/>
-              </a:lnSpc>
-              <a:spcAft>
-                <a:spcPts val="0"/>
-              </a:spcAft>
-            </a:pPr>
-            <a:r>
-              <a:rPr sz="1300" b="1">
-                <a:solidFill>
-                  <a:srgbClr val="E3E2DC"/>
-                </a:solidFill>
-                <a:latin typeface="Helvetica Neue"/>
-              </a:rPr>
-              <a:t>14</a:t>
-            </a:r>
-          </a:p>
-        </p:txBody>
-      </p:sp>
-      <p:sp>
-        <p:nvSpPr>
-          <p:cNvPr id="6" name="Rectangle 5"/>
+                <a:latin typeface="Menlo"/>
+              </a:rPr>
+              <a:t>github.com/acarmonag/cicd-bd</a:t>
+            </a:r>
+          </a:p>
+        </p:txBody>
+      </p:sp>
+      <p:sp>
+        <p:nvSpPr>
+          <p:cNvPr id="5" name="Rectangle 4"/>
           <p:cNvSpPr/>
           <p:nvPr/>
         </p:nvSpPr>
         <p:spPr>
           <a:xfrm>
-            <a:off x="731520" y="1417320"/>
-            <a:ext cx="10728655" cy="11430"/>
-          </a:xfrm>
-          <a:prstGeom prst="rect">
-            <a:avLst/>
-          </a:prstGeom>
-          <a:solidFill>
-            <a:srgbClr val="E3E2DC"/>
-          </a:solidFill>
-          <a:ln>
-            <a:noFill/>
-          </a:ln>
-          <a:effectLst/>
-        </p:spPr>
-        <p:style>
-          <a:lnRef idx="1">
-            <a:schemeClr val="accent1"/>
-          </a:lnRef>
-          <a:fillRef idx="3">
-            <a:schemeClr val="accent1"/>
-          </a:fillRef>
-          <a:effectRef idx="2">
-            <a:schemeClr val="accent1"/>
-          </a:effectRef>
-          <a:fontRef idx="minor">
-            <a:schemeClr val="lt1"/>
-          </a:fontRef>
-        </p:style>
-        <p:txBody>
-          <a:bodyPr rtlCol="0" anchor="ctr"/>
-          <a:lstStyle/>
-          <a:p>
-            <a:endParaRPr/>
-          </a:p>
-        </p:txBody>
-      </p:sp>
-      <p:sp>
-        <p:nvSpPr>
-          <p:cNvPr id="7" name="TextBox 6"/>
-          <p:cNvSpPr txBox="1"/>
-          <p:nvPr/>
-        </p:nvSpPr>
-        <p:spPr>
-          <a:xfrm>
-            <a:off x="731520" y="6355080"/>
-            <a:ext cx="10728655" cy="228600"/>
-          </a:xfrm>
-          <a:prstGeom prst="rect">
-            <a:avLst/>
-          </a:prstGeom>
-          <a:noFill/>
-        </p:spPr>
-        <p:txBody>
-          <a:bodyPr wrap="square" lIns="0" tIns="0" rIns="0" bIns="0">
-            <a:spAutoFit/>
-          </a:bodyPr>
-          <a:lstStyle/>
-          <a:p>
-            <a:pPr algn="l">
-              <a:lnSpc>
-                <a:spcPct val="110000"/>
-              </a:lnSpc>
-              <a:spcAft>
-                <a:spcPts val="0"/>
-              </a:spcAft>
-            </a:pPr>
-            <a:r>
-              <a:rPr sz="950" b="0">
-                <a:solidFill>
-                  <a:srgbClr val="E3E2DC"/>
-                </a:solidFill>
-                <a:latin typeface="Helvetica Neue"/>
-              </a:rPr>
-              <a:t>CI/CD en Base de Datos  ·  SI6010-5979  ·  Torneos deportivos</a:t>
-            </a:r>
-          </a:p>
-        </p:txBody>
-      </p:sp>
-      <p:sp>
-        <p:nvSpPr>
-          <p:cNvPr id="8" name="Rectangle 7"/>
-          <p:cNvSpPr/>
-          <p:nvPr/>
-        </p:nvSpPr>
-        <p:spPr>
-          <a:xfrm>
-            <a:off x="731520" y="1737360"/>
-            <a:ext cx="5230368" cy="1261872"/>
+            <a:off x="2113528" y="2693439"/>
+            <a:ext cx="2514600" cy="1143000"/>
           </a:xfrm>
           <a:prstGeom prst="rect">
             <a:avLst/>
@@ -9218,142 +9089,155 @@
       </p:sp>
       <p:sp>
         <p:nvSpPr>
-          <p:cNvPr id="9" name="Rectangle 8"/>
+          <p:cNvPr id="6" name="TextBox 5"/>
+          <p:cNvSpPr txBox="1"/>
+          <p:nvPr/>
+        </p:nvSpPr>
+        <p:spPr>
+          <a:xfrm>
+            <a:off x="1994503" y="2944368"/>
+            <a:ext cx="2514600" cy="320040"/>
+          </a:xfrm>
+          <a:prstGeom prst="rect">
+            <a:avLst/>
+          </a:prstGeom>
+          <a:noFill/>
+        </p:spPr>
+        <p:txBody>
+          <a:bodyPr wrap="square" lIns="0" tIns="0" rIns="0" bIns="0">
+            <a:spAutoFit/>
+          </a:bodyPr>
+          <a:lstStyle/>
+          <a:p>
+            <a:pPr algn="ctr">
+              <a:lnSpc>
+                <a:spcPct val="110000"/>
+              </a:lnSpc>
+              <a:spcAft>
+                <a:spcPts val="0"/>
+              </a:spcAft>
+            </a:pPr>
+            <a:r>
+              <a:rPr sz="1700" b="1" dirty="0">
+                <a:solidFill>
+                  <a:srgbClr val="4338CA"/>
+                </a:solidFill>
+                <a:latin typeface="Helvetica Neue"/>
+              </a:rPr>
+              <a:t>8 </a:t>
+            </a:r>
+            <a:r>
+              <a:rPr sz="1700" b="1" dirty="0" err="1">
+                <a:solidFill>
+                  <a:srgbClr val="4338CA"/>
+                </a:solidFill>
+                <a:latin typeface="Helvetica Neue"/>
+              </a:rPr>
+              <a:t>tablas</a:t>
+            </a:r>
+            <a:endParaRPr sz="1700" b="1" dirty="0">
+              <a:solidFill>
+                <a:srgbClr val="4338CA"/>
+              </a:solidFill>
+              <a:latin typeface="Helvetica Neue"/>
+            </a:endParaRPr>
+          </a:p>
+        </p:txBody>
+      </p:sp>
+      <p:sp>
+        <p:nvSpPr>
+          <p:cNvPr id="7" name="TextBox 6"/>
+          <p:cNvSpPr txBox="1"/>
+          <p:nvPr/>
+        </p:nvSpPr>
+        <p:spPr>
+          <a:xfrm>
+            <a:off x="2131663" y="3319272"/>
+            <a:ext cx="2240280" cy="320040"/>
+          </a:xfrm>
+          <a:prstGeom prst="rect">
+            <a:avLst/>
+          </a:prstGeom>
+          <a:noFill/>
+        </p:spPr>
+        <p:txBody>
+          <a:bodyPr wrap="square" lIns="0" tIns="0" rIns="0" bIns="0">
+            <a:spAutoFit/>
+          </a:bodyPr>
+          <a:lstStyle/>
+          <a:p>
+            <a:pPr algn="ctr">
+              <a:lnSpc>
+                <a:spcPct val="125000"/>
+              </a:lnSpc>
+              <a:spcAft>
+                <a:spcPts val="0"/>
+              </a:spcAft>
+            </a:pPr>
+            <a:r>
+              <a:rPr sz="1050" b="0" dirty="0" err="1">
+                <a:solidFill>
+                  <a:srgbClr val="6E747E"/>
+                </a:solidFill>
+                <a:latin typeface="Helvetica Neue"/>
+              </a:rPr>
+              <a:t>modelo</a:t>
+            </a:r>
+            <a:r>
+              <a:rPr sz="1050" b="0" dirty="0">
+                <a:solidFill>
+                  <a:srgbClr val="6E747E"/>
+                </a:solidFill>
+                <a:latin typeface="Helvetica Neue"/>
+              </a:rPr>
+              <a:t> </a:t>
+            </a:r>
+            <a:r>
+              <a:rPr sz="1050" b="0" dirty="0" err="1">
+                <a:solidFill>
+                  <a:srgbClr val="6E747E"/>
+                </a:solidFill>
+                <a:latin typeface="Helvetica Neue"/>
+              </a:rPr>
+              <a:t>propio</a:t>
+            </a:r>
+            <a:r>
+              <a:rPr sz="1050" b="0" dirty="0">
+                <a:solidFill>
+                  <a:srgbClr val="6E747E"/>
+                </a:solidFill>
+                <a:latin typeface="Helvetica Neue"/>
+              </a:rPr>
+              <a:t> de </a:t>
+            </a:r>
+            <a:r>
+              <a:rPr sz="1050" b="0" dirty="0" err="1">
+                <a:solidFill>
+                  <a:srgbClr val="6E747E"/>
+                </a:solidFill>
+                <a:latin typeface="Helvetica Neue"/>
+              </a:rPr>
+              <a:t>torneos</a:t>
+            </a:r>
+            <a:endParaRPr sz="1050" b="0" dirty="0">
+              <a:solidFill>
+                <a:srgbClr val="6E747E"/>
+              </a:solidFill>
+              <a:latin typeface="Helvetica Neue"/>
+            </a:endParaRPr>
+          </a:p>
+        </p:txBody>
+      </p:sp>
+      <p:sp>
+        <p:nvSpPr>
+          <p:cNvPr id="8" name="Rectangle 7"/>
           <p:cNvSpPr/>
           <p:nvPr/>
         </p:nvSpPr>
         <p:spPr>
           <a:xfrm>
-            <a:off x="731520" y="1737360"/>
-            <a:ext cx="45720" cy="1261872"/>
-          </a:xfrm>
-          <a:prstGeom prst="rect">
-            <a:avLst/>
-          </a:prstGeom>
-          <a:solidFill>
-            <a:srgbClr val="4338CA"/>
-          </a:solidFill>
-          <a:ln>
-            <a:noFill/>
-          </a:ln>
-          <a:effectLst/>
-        </p:spPr>
-        <p:style>
-          <a:lnRef idx="1">
-            <a:schemeClr val="accent1"/>
-          </a:lnRef>
-          <a:fillRef idx="3">
-            <a:schemeClr val="accent1"/>
-          </a:fillRef>
-          <a:effectRef idx="2">
-            <a:schemeClr val="accent1"/>
-          </a:effectRef>
-          <a:fontRef idx="minor">
-            <a:schemeClr val="lt1"/>
-          </a:fontRef>
-        </p:style>
-        <p:txBody>
-          <a:bodyPr rtlCol="0" anchor="ctr"/>
-          <a:lstStyle/>
-          <a:p>
-            <a:endParaRPr/>
-          </a:p>
-        </p:txBody>
-      </p:sp>
-      <p:sp>
-        <p:nvSpPr>
-          <p:cNvPr id="10" name="TextBox 9"/>
-          <p:cNvSpPr txBox="1"/>
-          <p:nvPr/>
-        </p:nvSpPr>
-        <p:spPr>
-          <a:xfrm>
-            <a:off x="987552" y="1920240"/>
-            <a:ext cx="4754880" cy="365760"/>
-          </a:xfrm>
-          <a:prstGeom prst="rect">
-            <a:avLst/>
-          </a:prstGeom>
-          <a:noFill/>
-        </p:spPr>
-        <p:txBody>
-          <a:bodyPr wrap="square" lIns="0" tIns="0" rIns="0" bIns="0">
-            <a:spAutoFit/>
-          </a:bodyPr>
-          <a:lstStyle/>
-          <a:p>
-            <a:pPr algn="l">
-              <a:lnSpc>
-                <a:spcPct val="125000"/>
-              </a:lnSpc>
-              <a:spcAft>
-                <a:spcPts val="0"/>
-              </a:spcAft>
-            </a:pPr>
-            <a:r>
-              <a:rPr sz="1200" b="1">
-                <a:solidFill>
-                  <a:srgbClr val="21252D"/>
-                </a:solidFill>
-                <a:latin typeface="Helvetica Neue"/>
-              </a:rPr>
-              <a:t>¿Por qué Flyway no deja modificar una migración ya aplicada?</a:t>
-            </a:r>
-          </a:p>
-        </p:txBody>
-      </p:sp>
-      <p:sp>
-        <p:nvSpPr>
-          <p:cNvPr id="11" name="TextBox 10"/>
-          <p:cNvSpPr txBox="1"/>
-          <p:nvPr/>
-        </p:nvSpPr>
-        <p:spPr>
-          <a:xfrm>
-            <a:off x="987552" y="2304288"/>
-            <a:ext cx="4754880" cy="640080"/>
-          </a:xfrm>
-          <a:prstGeom prst="rect">
-            <a:avLst/>
-          </a:prstGeom>
-          <a:noFill/>
-        </p:spPr>
-        <p:txBody>
-          <a:bodyPr wrap="square" lIns="0" tIns="0" rIns="0" bIns="0">
-            <a:spAutoFit/>
-          </a:bodyPr>
-          <a:lstStyle/>
-          <a:p>
-            <a:pPr algn="l">
-              <a:lnSpc>
-                <a:spcPct val="138000"/>
-              </a:lnSpc>
-              <a:spcAft>
-                <a:spcPts val="0"/>
-              </a:spcAft>
-            </a:pPr>
-            <a:r>
-              <a:rPr sz="1050" b="0">
-                <a:solidFill>
-                  <a:srgbClr val="6E747E"/>
-                </a:solidFill>
-                <a:latin typeface="Helvetica Neue"/>
-              </a:rPr>
-              <a:t>Guarda el checksum de cada archivo en flyway_schema_history. Si el archivo cambia, el checksum no coincide y validate falla antes del migrate.</a:t>
-            </a:r>
-          </a:p>
-        </p:txBody>
-      </p:sp>
-      <p:sp>
-        <p:nvSpPr>
-          <p:cNvPr id="12" name="Rectangle 11"/>
-          <p:cNvSpPr/>
-          <p:nvPr/>
-        </p:nvSpPr>
-        <p:spPr>
-          <a:xfrm>
-            <a:off x="6199632" y="1737360"/>
-            <a:ext cx="5230368" cy="1261872"/>
+            <a:off x="4865872" y="2693439"/>
+            <a:ext cx="2514600" cy="1143000"/>
           </a:xfrm>
           <a:prstGeom prst="rect">
             <a:avLst/>
@@ -9392,142 +9276,113 @@
       </p:sp>
       <p:sp>
         <p:nvSpPr>
-          <p:cNvPr id="13" name="Rectangle 12"/>
+          <p:cNvPr id="9" name="TextBox 8"/>
+          <p:cNvSpPr txBox="1"/>
+          <p:nvPr/>
+        </p:nvSpPr>
+        <p:spPr>
+          <a:xfrm>
+            <a:off x="4806513" y="2960901"/>
+            <a:ext cx="2514600" cy="320040"/>
+          </a:xfrm>
+          <a:prstGeom prst="rect">
+            <a:avLst/>
+          </a:prstGeom>
+          <a:noFill/>
+        </p:spPr>
+        <p:txBody>
+          <a:bodyPr wrap="square" lIns="0" tIns="0" rIns="0" bIns="0">
+            <a:spAutoFit/>
+          </a:bodyPr>
+          <a:lstStyle/>
+          <a:p>
+            <a:pPr algn="ctr">
+              <a:lnSpc>
+                <a:spcPct val="110000"/>
+              </a:lnSpc>
+              <a:spcAft>
+                <a:spcPts val="0"/>
+              </a:spcAft>
+            </a:pPr>
+            <a:r>
+              <a:rPr sz="1700" b="1" dirty="0">
+                <a:solidFill>
+                  <a:srgbClr val="4338CA"/>
+                </a:solidFill>
+                <a:latin typeface="Helvetica Neue"/>
+              </a:rPr>
+              <a:t>7 </a:t>
+            </a:r>
+            <a:r>
+              <a:rPr sz="1700" b="1" dirty="0" err="1">
+                <a:solidFill>
+                  <a:srgbClr val="4338CA"/>
+                </a:solidFill>
+                <a:latin typeface="Helvetica Neue"/>
+              </a:rPr>
+              <a:t>migraciones</a:t>
+            </a:r>
+            <a:endParaRPr sz="1700" b="1" dirty="0">
+              <a:solidFill>
+                <a:srgbClr val="4338CA"/>
+              </a:solidFill>
+              <a:latin typeface="Helvetica Neue"/>
+            </a:endParaRPr>
+          </a:p>
+        </p:txBody>
+      </p:sp>
+      <p:sp>
+        <p:nvSpPr>
+          <p:cNvPr id="10" name="TextBox 9"/>
+          <p:cNvSpPr txBox="1"/>
+          <p:nvPr/>
+        </p:nvSpPr>
+        <p:spPr>
+          <a:xfrm>
+            <a:off x="4943673" y="3335805"/>
+            <a:ext cx="2240280" cy="320040"/>
+          </a:xfrm>
+          <a:prstGeom prst="rect">
+            <a:avLst/>
+          </a:prstGeom>
+          <a:noFill/>
+        </p:spPr>
+        <p:txBody>
+          <a:bodyPr wrap="square" lIns="0" tIns="0" rIns="0" bIns="0">
+            <a:spAutoFit/>
+          </a:bodyPr>
+          <a:lstStyle/>
+          <a:p>
+            <a:pPr algn="ctr">
+              <a:lnSpc>
+                <a:spcPct val="125000"/>
+              </a:lnSpc>
+              <a:spcAft>
+                <a:spcPts val="0"/>
+              </a:spcAft>
+            </a:pPr>
+            <a:r>
+              <a:rPr sz="1050" b="0">
+                <a:solidFill>
+                  <a:srgbClr val="6E747E"/>
+                </a:solidFill>
+                <a:latin typeface="Helvetica Neue"/>
+              </a:rPr>
+              <a:t>6 versionadas  +  1 repetible</a:t>
+            </a:r>
+          </a:p>
+        </p:txBody>
+      </p:sp>
+      <p:sp>
+        <p:nvSpPr>
+          <p:cNvPr id="11" name="Rectangle 10"/>
           <p:cNvSpPr/>
           <p:nvPr/>
         </p:nvSpPr>
         <p:spPr>
           <a:xfrm>
-            <a:off x="6199632" y="1737360"/>
-            <a:ext cx="45720" cy="1261872"/>
-          </a:xfrm>
-          <a:prstGeom prst="rect">
-            <a:avLst/>
-          </a:prstGeom>
-          <a:solidFill>
-            <a:srgbClr val="4338CA"/>
-          </a:solidFill>
-          <a:ln>
-            <a:noFill/>
-          </a:ln>
-          <a:effectLst/>
-        </p:spPr>
-        <p:style>
-          <a:lnRef idx="1">
-            <a:schemeClr val="accent1"/>
-          </a:lnRef>
-          <a:fillRef idx="3">
-            <a:schemeClr val="accent1"/>
-          </a:fillRef>
-          <a:effectRef idx="2">
-            <a:schemeClr val="accent1"/>
-          </a:effectRef>
-          <a:fontRef idx="minor">
-            <a:schemeClr val="lt1"/>
-          </a:fontRef>
-        </p:style>
-        <p:txBody>
-          <a:bodyPr rtlCol="0" anchor="ctr"/>
-          <a:lstStyle/>
-          <a:p>
-            <a:endParaRPr/>
-          </a:p>
-        </p:txBody>
-      </p:sp>
-      <p:sp>
-        <p:nvSpPr>
-          <p:cNvPr id="14" name="TextBox 13"/>
-          <p:cNvSpPr txBox="1"/>
-          <p:nvPr/>
-        </p:nvSpPr>
-        <p:spPr>
-          <a:xfrm>
-            <a:off x="6455664" y="1920240"/>
-            <a:ext cx="4754880" cy="365760"/>
-          </a:xfrm>
-          <a:prstGeom prst="rect">
-            <a:avLst/>
-          </a:prstGeom>
-          <a:noFill/>
-        </p:spPr>
-        <p:txBody>
-          <a:bodyPr wrap="square" lIns="0" tIns="0" rIns="0" bIns="0">
-            <a:spAutoFit/>
-          </a:bodyPr>
-          <a:lstStyle/>
-          <a:p>
-            <a:pPr algn="l">
-              <a:lnSpc>
-                <a:spcPct val="125000"/>
-              </a:lnSpc>
-              <a:spcAft>
-                <a:spcPts val="0"/>
-              </a:spcAft>
-            </a:pPr>
-            <a:r>
-              <a:rPr sz="1200" b="1">
-                <a:solidFill>
-                  <a:srgbClr val="21252D"/>
-                </a:solidFill>
-                <a:latin typeface="Helvetica Neue"/>
-              </a:rPr>
-              <a:t>¿Cuándo usar R__ en vez de V__?</a:t>
-            </a:r>
-          </a:p>
-        </p:txBody>
-      </p:sp>
-      <p:sp>
-        <p:nvSpPr>
-          <p:cNvPr id="15" name="TextBox 14"/>
-          <p:cNvSpPr txBox="1"/>
-          <p:nvPr/>
-        </p:nvSpPr>
-        <p:spPr>
-          <a:xfrm>
-            <a:off x="6455664" y="2304288"/>
-            <a:ext cx="4754880" cy="640080"/>
-          </a:xfrm>
-          <a:prstGeom prst="rect">
-            <a:avLst/>
-          </a:prstGeom>
-          <a:noFill/>
-        </p:spPr>
-        <p:txBody>
-          <a:bodyPr wrap="square" lIns="0" tIns="0" rIns="0" bIns="0">
-            <a:spAutoFit/>
-          </a:bodyPr>
-          <a:lstStyle/>
-          <a:p>
-            <a:pPr algn="l">
-              <a:lnSpc>
-                <a:spcPct val="138000"/>
-              </a:lnSpc>
-              <a:spcAft>
-                <a:spcPts val="0"/>
-              </a:spcAft>
-            </a:pPr>
-            <a:r>
-              <a:rPr sz="1050" b="0">
-                <a:solidFill>
-                  <a:srgbClr val="6E747E"/>
-                </a:solidFill>
-                <a:latin typeface="Helvetica Neue"/>
-              </a:rPr>
-              <a:t>Objetos que se redefinen completos y son idempotentes: vistas, funciones, procedimientos. Nuestra vw_tournament_standings es CREATE OR REPLACE. Nunca para DDL estructural.</a:t>
-            </a:r>
-          </a:p>
-        </p:txBody>
-      </p:sp>
-      <p:sp>
-        <p:nvSpPr>
-          <p:cNvPr id="16" name="Rectangle 15"/>
-          <p:cNvSpPr/>
-          <p:nvPr/>
-        </p:nvSpPr>
-        <p:spPr>
-          <a:xfrm>
-            <a:off x="731520" y="3154680"/>
-            <a:ext cx="5230368" cy="1261872"/>
+            <a:off x="7499497" y="2701520"/>
+            <a:ext cx="2514600" cy="1143000"/>
           </a:xfrm>
           <a:prstGeom prst="rect">
             <a:avLst/>
@@ -9566,71 +9421,69 @@
       </p:sp>
       <p:sp>
         <p:nvSpPr>
-          <p:cNvPr id="17" name="Rectangle 16"/>
-          <p:cNvSpPr/>
-          <p:nvPr/>
-        </p:nvSpPr>
-        <p:spPr>
-          <a:xfrm>
-            <a:off x="731520" y="3154680"/>
-            <a:ext cx="45720" cy="1261872"/>
-          </a:xfrm>
-          <a:prstGeom prst="rect">
-            <a:avLst/>
-          </a:prstGeom>
-          <a:solidFill>
-            <a:srgbClr val="4338CA"/>
-          </a:solidFill>
-          <a:ln>
-            <a:noFill/>
-          </a:ln>
-          <a:effectLst/>
-        </p:spPr>
-        <p:style>
-          <a:lnRef idx="1">
-            <a:schemeClr val="accent1"/>
-          </a:lnRef>
-          <a:fillRef idx="3">
-            <a:schemeClr val="accent1"/>
-          </a:fillRef>
-          <a:effectRef idx="2">
-            <a:schemeClr val="accent1"/>
-          </a:effectRef>
-          <a:fontRef idx="minor">
-            <a:schemeClr val="lt1"/>
-          </a:fontRef>
-        </p:style>
-        <p:txBody>
-          <a:bodyPr rtlCol="0" anchor="ctr"/>
-          <a:lstStyle/>
-          <a:p>
-            <a:endParaRPr/>
-          </a:p>
-        </p:txBody>
-      </p:sp>
-      <p:sp>
-        <p:nvSpPr>
-          <p:cNvPr id="18" name="TextBox 17"/>
-          <p:cNvSpPr txBox="1"/>
-          <p:nvPr/>
-        </p:nvSpPr>
-        <p:spPr>
-          <a:xfrm>
-            <a:off x="987552" y="3337560"/>
-            <a:ext cx="4754880" cy="365760"/>
-          </a:xfrm>
-          <a:prstGeom prst="rect">
-            <a:avLst/>
-          </a:prstGeom>
-          <a:noFill/>
-        </p:spPr>
-        <p:txBody>
-          <a:bodyPr wrap="square" lIns="0" tIns="0" rIns="0" bIns="0">
-            <a:spAutoFit/>
-          </a:bodyPr>
-          <a:lstStyle/>
-          <a:p>
-            <a:pPr algn="l">
+          <p:cNvPr id="12" name="TextBox 11"/>
+          <p:cNvSpPr txBox="1"/>
+          <p:nvPr/>
+        </p:nvSpPr>
+        <p:spPr>
+          <a:xfrm>
+            <a:off x="7398914" y="2960901"/>
+            <a:ext cx="2514600" cy="320040"/>
+          </a:xfrm>
+          <a:prstGeom prst="rect">
+            <a:avLst/>
+          </a:prstGeom>
+          <a:noFill/>
+        </p:spPr>
+        <p:txBody>
+          <a:bodyPr wrap="square" lIns="0" tIns="0" rIns="0" bIns="0">
+            <a:spAutoFit/>
+          </a:bodyPr>
+          <a:lstStyle/>
+          <a:p>
+            <a:pPr algn="ctr">
+              <a:lnSpc>
+                <a:spcPct val="110000"/>
+              </a:lnSpc>
+              <a:spcAft>
+                <a:spcPts val="0"/>
+              </a:spcAft>
+            </a:pPr>
+            <a:r>
+              <a:rPr sz="1700" b="1" dirty="0">
+                <a:solidFill>
+                  <a:srgbClr val="4338CA"/>
+                </a:solidFill>
+                <a:latin typeface="Helvetica Neue"/>
+              </a:rPr>
+              <a:t>Pipeline dual</a:t>
+            </a:r>
+          </a:p>
+        </p:txBody>
+      </p:sp>
+      <p:sp>
+        <p:nvSpPr>
+          <p:cNvPr id="13" name="TextBox 12"/>
+          <p:cNvSpPr txBox="1"/>
+          <p:nvPr/>
+        </p:nvSpPr>
+        <p:spPr>
+          <a:xfrm>
+            <a:off x="7536074" y="3335805"/>
+            <a:ext cx="2240280" cy="320040"/>
+          </a:xfrm>
+          <a:prstGeom prst="rect">
+            <a:avLst/>
+          </a:prstGeom>
+          <a:noFill/>
+        </p:spPr>
+        <p:txBody>
+          <a:bodyPr wrap="square" lIns="0" tIns="0" rIns="0" bIns="0">
+            <a:spAutoFit/>
+          </a:bodyPr>
+          <a:lstStyle/>
+          <a:p>
+            <a:pPr algn="ctr">
               <a:lnSpc>
                 <a:spcPct val="125000"/>
               </a:lnSpc>
@@ -9639,1258 +9492,13 @@
               </a:spcAft>
             </a:pPr>
             <a:r>
-              <a:rPr sz="1200" b="1">
-                <a:solidFill>
-                  <a:srgbClr val="21252D"/>
-                </a:solidFill>
-                <a:latin typeface="Helvetica Neue"/>
-              </a:rPr>
-              <a:t>¿Por qué el error de 'arbitros' no quedó en el historial?</a:t>
-            </a:r>
-          </a:p>
-        </p:txBody>
-      </p:sp>
-      <p:sp>
-        <p:nvSpPr>
-          <p:cNvPr id="19" name="TextBox 18"/>
-          <p:cNvSpPr txBox="1"/>
-          <p:nvPr/>
-        </p:nvSpPr>
-        <p:spPr>
-          <a:xfrm>
-            <a:off x="987552" y="3721608"/>
-            <a:ext cx="4754880" cy="640080"/>
-          </a:xfrm>
-          <a:prstGeom prst="rect">
-            <a:avLst/>
-          </a:prstGeom>
-          <a:noFill/>
-        </p:spPr>
-        <p:txBody>
-          <a:bodyPr wrap="square" lIns="0" tIns="0" rIns="0" bIns="0">
-            <a:spAutoFit/>
-          </a:bodyPr>
-          <a:lstStyle/>
-          <a:p>
-            <a:pPr algn="l">
-              <a:lnSpc>
-                <a:spcPct val="138000"/>
-              </a:lnSpc>
-              <a:spcAft>
-                <a:spcPts val="0"/>
-              </a:spcAft>
-            </a:pPr>
-            <a:r>
               <a:rPr sz="1050" b="0">
                 <a:solidFill>
                   <a:srgbClr val="6E747E"/>
                 </a:solidFill>
                 <a:latin typeface="Helvetica Neue"/>
               </a:rPr>
-              <a:t>PostgreSQL es transaccional para DDL: Flyway revirtió la migración fallida y no insertó la fila. Por eso pudimos corregir el mismo archivo en vez de crear una V nueva.</a:t>
-            </a:r>
-          </a:p>
-        </p:txBody>
-      </p:sp>
-      <p:sp>
-        <p:nvSpPr>
-          <p:cNvPr id="20" name="Rectangle 19"/>
-          <p:cNvSpPr/>
-          <p:nvPr/>
-        </p:nvSpPr>
-        <p:spPr>
-          <a:xfrm>
-            <a:off x="6199632" y="3154680"/>
-            <a:ext cx="5230368" cy="1261872"/>
-          </a:xfrm>
-          <a:prstGeom prst="rect">
-            <a:avLst/>
-          </a:prstGeom>
-          <a:solidFill>
-            <a:srgbClr val="FFFFFF"/>
-          </a:solidFill>
-          <a:ln w="12700">
-            <a:solidFill>
-              <a:srgbClr val="E3E2DC"/>
-            </a:solidFill>
-          </a:ln>
-          <a:effectLst/>
-        </p:spPr>
-        <p:style>
-          <a:lnRef idx="1">
-            <a:schemeClr val="accent1"/>
-          </a:lnRef>
-          <a:fillRef idx="3">
-            <a:schemeClr val="accent1"/>
-          </a:fillRef>
-          <a:effectRef idx="2">
-            <a:schemeClr val="accent1"/>
-          </a:effectRef>
-          <a:fontRef idx="minor">
-            <a:schemeClr val="lt1"/>
-          </a:fontRef>
-        </p:style>
-        <p:txBody>
-          <a:bodyPr rtlCol="0" anchor="ctr"/>
-          <a:lstStyle/>
-          <a:p>
-            <a:endParaRPr/>
-          </a:p>
-        </p:txBody>
-      </p:sp>
-      <p:sp>
-        <p:nvSpPr>
-          <p:cNvPr id="21" name="Rectangle 20"/>
-          <p:cNvSpPr/>
-          <p:nvPr/>
-        </p:nvSpPr>
-        <p:spPr>
-          <a:xfrm>
-            <a:off x="6199632" y="3154680"/>
-            <a:ext cx="45720" cy="1261872"/>
-          </a:xfrm>
-          <a:prstGeom prst="rect">
-            <a:avLst/>
-          </a:prstGeom>
-          <a:solidFill>
-            <a:srgbClr val="4338CA"/>
-          </a:solidFill>
-          <a:ln>
-            <a:noFill/>
-          </a:ln>
-          <a:effectLst/>
-        </p:spPr>
-        <p:style>
-          <a:lnRef idx="1">
-            <a:schemeClr val="accent1"/>
-          </a:lnRef>
-          <a:fillRef idx="3">
-            <a:schemeClr val="accent1"/>
-          </a:fillRef>
-          <a:effectRef idx="2">
-            <a:schemeClr val="accent1"/>
-          </a:effectRef>
-          <a:fontRef idx="minor">
-            <a:schemeClr val="lt1"/>
-          </a:fontRef>
-        </p:style>
-        <p:txBody>
-          <a:bodyPr rtlCol="0" anchor="ctr"/>
-          <a:lstStyle/>
-          <a:p>
-            <a:endParaRPr/>
-          </a:p>
-        </p:txBody>
-      </p:sp>
-      <p:sp>
-        <p:nvSpPr>
-          <p:cNvPr id="22" name="TextBox 21"/>
-          <p:cNvSpPr txBox="1"/>
-          <p:nvPr/>
-        </p:nvSpPr>
-        <p:spPr>
-          <a:xfrm>
-            <a:off x="6455664" y="3337560"/>
-            <a:ext cx="4754880" cy="365760"/>
-          </a:xfrm>
-          <a:prstGeom prst="rect">
-            <a:avLst/>
-          </a:prstGeom>
-          <a:noFill/>
-        </p:spPr>
-        <p:txBody>
-          <a:bodyPr wrap="square" lIns="0" tIns="0" rIns="0" bIns="0">
-            <a:spAutoFit/>
-          </a:bodyPr>
-          <a:lstStyle/>
-          <a:p>
-            <a:pPr algn="l">
-              <a:lnSpc>
-                <a:spcPct val="125000"/>
-              </a:lnSpc>
-              <a:spcAft>
-                <a:spcPts val="0"/>
-              </a:spcAft>
-            </a:pPr>
-            <a:r>
-              <a:rPr sz="1200" b="1">
-                <a:solidFill>
-                  <a:srgbClr val="21252D"/>
-                </a:solidFill>
-                <a:latin typeface="Helvetica Neue"/>
-              </a:rPr>
-              <a:t>¿Y si dos personas crean la misma versión a la vez?</a:t>
-            </a:r>
-          </a:p>
-        </p:txBody>
-      </p:sp>
-      <p:sp>
-        <p:nvSpPr>
-          <p:cNvPr id="23" name="TextBox 22"/>
-          <p:cNvSpPr txBox="1"/>
-          <p:nvPr/>
-        </p:nvSpPr>
-        <p:spPr>
-          <a:xfrm>
-            <a:off x="6455664" y="3721608"/>
-            <a:ext cx="4754880" cy="640080"/>
-          </a:xfrm>
-          <a:prstGeom prst="rect">
-            <a:avLst/>
-          </a:prstGeom>
-          <a:noFill/>
-        </p:spPr>
-        <p:txBody>
-          <a:bodyPr wrap="square" lIns="0" tIns="0" rIns="0" bIns="0">
-            <a:spAutoFit/>
-          </a:bodyPr>
-          <a:lstStyle/>
-          <a:p>
-            <a:pPr algn="l">
-              <a:lnSpc>
-                <a:spcPct val="138000"/>
-              </a:lnSpc>
-              <a:spcAft>
-                <a:spcPts val="0"/>
-              </a:spcAft>
-            </a:pPr>
-            <a:r>
-              <a:rPr sz="1050" b="0">
-                <a:solidFill>
-                  <a:srgbClr val="6E747E"/>
-                </a:solidFill>
-                <a:latin typeface="Helvetica Neue"/>
-              </a:rPr>
-              <a:t>Usamos timestamps V{YYYYMMDDHHmmss} en vez de V1, V2… — la colisión es prácticamente imposible, y si ocurriera, validate la detecta antes del merge.</a:t>
-            </a:r>
-          </a:p>
-        </p:txBody>
-      </p:sp>
-      <p:sp>
-        <p:nvSpPr>
-          <p:cNvPr id="24" name="Rectangle 23"/>
-          <p:cNvSpPr/>
-          <p:nvPr/>
-        </p:nvSpPr>
-        <p:spPr>
-          <a:xfrm>
-            <a:off x="731520" y="4572000"/>
-            <a:ext cx="5230368" cy="1261872"/>
-          </a:xfrm>
-          <a:prstGeom prst="rect">
-            <a:avLst/>
-          </a:prstGeom>
-          <a:solidFill>
-            <a:srgbClr val="FFFFFF"/>
-          </a:solidFill>
-          <a:ln w="12700">
-            <a:solidFill>
-              <a:srgbClr val="E3E2DC"/>
-            </a:solidFill>
-          </a:ln>
-          <a:effectLst/>
-        </p:spPr>
-        <p:style>
-          <a:lnRef idx="1">
-            <a:schemeClr val="accent1"/>
-          </a:lnRef>
-          <a:fillRef idx="3">
-            <a:schemeClr val="accent1"/>
-          </a:fillRef>
-          <a:effectRef idx="2">
-            <a:schemeClr val="accent1"/>
-          </a:effectRef>
-          <a:fontRef idx="minor">
-            <a:schemeClr val="lt1"/>
-          </a:fontRef>
-        </p:style>
-        <p:txBody>
-          <a:bodyPr rtlCol="0" anchor="ctr"/>
-          <a:lstStyle/>
-          <a:p>
-            <a:endParaRPr/>
-          </a:p>
-        </p:txBody>
-      </p:sp>
-      <p:sp>
-        <p:nvSpPr>
-          <p:cNvPr id="25" name="Rectangle 24"/>
-          <p:cNvSpPr/>
-          <p:nvPr/>
-        </p:nvSpPr>
-        <p:spPr>
-          <a:xfrm>
-            <a:off x="731520" y="4572000"/>
-            <a:ext cx="45720" cy="1261872"/>
-          </a:xfrm>
-          <a:prstGeom prst="rect">
-            <a:avLst/>
-          </a:prstGeom>
-          <a:solidFill>
-            <a:srgbClr val="4338CA"/>
-          </a:solidFill>
-          <a:ln>
-            <a:noFill/>
-          </a:ln>
-          <a:effectLst/>
-        </p:spPr>
-        <p:style>
-          <a:lnRef idx="1">
-            <a:schemeClr val="accent1"/>
-          </a:lnRef>
-          <a:fillRef idx="3">
-            <a:schemeClr val="accent1"/>
-          </a:fillRef>
-          <a:effectRef idx="2">
-            <a:schemeClr val="accent1"/>
-          </a:effectRef>
-          <a:fontRef idx="minor">
-            <a:schemeClr val="lt1"/>
-          </a:fontRef>
-        </p:style>
-        <p:txBody>
-          <a:bodyPr rtlCol="0" anchor="ctr"/>
-          <a:lstStyle/>
-          <a:p>
-            <a:endParaRPr/>
-          </a:p>
-        </p:txBody>
-      </p:sp>
-      <p:sp>
-        <p:nvSpPr>
-          <p:cNvPr id="26" name="TextBox 25"/>
-          <p:cNvSpPr txBox="1"/>
-          <p:nvPr/>
-        </p:nvSpPr>
-        <p:spPr>
-          <a:xfrm>
-            <a:off x="987552" y="4754880"/>
-            <a:ext cx="4754880" cy="365760"/>
-          </a:xfrm>
-          <a:prstGeom prst="rect">
-            <a:avLst/>
-          </a:prstGeom>
-          <a:noFill/>
-        </p:spPr>
-        <p:txBody>
-          <a:bodyPr wrap="square" lIns="0" tIns="0" rIns="0" bIns="0">
-            <a:spAutoFit/>
-          </a:bodyPr>
-          <a:lstStyle/>
-          <a:p>
-            <a:pPr algn="l">
-              <a:lnSpc>
-                <a:spcPct val="125000"/>
-              </a:lnSpc>
-              <a:spcAft>
-                <a:spcPts val="0"/>
-              </a:spcAft>
-            </a:pPr>
-            <a:r>
-              <a:rPr sz="1200" b="1">
-                <a:solidFill>
-                  <a:srgbClr val="21252D"/>
-                </a:solidFill>
-                <a:latin typeface="Helvetica Neue"/>
-              </a:rPr>
-              <a:t>¿Se puede reconstruir la base desde cero?</a:t>
-            </a:r>
-          </a:p>
-        </p:txBody>
-      </p:sp>
-      <p:sp>
-        <p:nvSpPr>
-          <p:cNvPr id="27" name="TextBox 26"/>
-          <p:cNvSpPr txBox="1"/>
-          <p:nvPr/>
-        </p:nvSpPr>
-        <p:spPr>
-          <a:xfrm>
-            <a:off x="987552" y="5138928"/>
-            <a:ext cx="4754880" cy="640080"/>
-          </a:xfrm>
-          <a:prstGeom prst="rect">
-            <a:avLst/>
-          </a:prstGeom>
-          <a:noFill/>
-        </p:spPr>
-        <p:txBody>
-          <a:bodyPr wrap="square" lIns="0" tIns="0" rIns="0" bIns="0">
-            <a:spAutoFit/>
-          </a:bodyPr>
-          <a:lstStyle/>
-          <a:p>
-            <a:pPr algn="l">
-              <a:lnSpc>
-                <a:spcPct val="138000"/>
-              </a:lnSpc>
-              <a:spcAft>
-                <a:spcPts val="0"/>
-              </a:spcAft>
-            </a:pPr>
-            <a:r>
-              <a:rPr sz="1050" b="0">
-                <a:solidFill>
-                  <a:srgbClr val="6E747E"/>
-                </a:solidFill>
-                <a:latin typeface="Helvetica Neue"/>
-              </a:rPr>
-              <a:t>Sí: flyway clean &amp;&amp; flyway migrate en dev. La primera migración es un cleanup idempotente con DROP … IF EXISTS, así que el baseline siempre parte de un esquema limpio.</a:t>
-            </a:r>
-          </a:p>
-        </p:txBody>
-      </p:sp>
-      <p:sp>
-        <p:nvSpPr>
-          <p:cNvPr id="28" name="Rectangle 27"/>
-          <p:cNvSpPr/>
-          <p:nvPr/>
-        </p:nvSpPr>
-        <p:spPr>
-          <a:xfrm>
-            <a:off x="6199632" y="4572000"/>
-            <a:ext cx="5230368" cy="1261872"/>
-          </a:xfrm>
-          <a:prstGeom prst="rect">
-            <a:avLst/>
-          </a:prstGeom>
-          <a:solidFill>
-            <a:srgbClr val="FFFFFF"/>
-          </a:solidFill>
-          <a:ln w="12700">
-            <a:solidFill>
-              <a:srgbClr val="E3E2DC"/>
-            </a:solidFill>
-          </a:ln>
-          <a:effectLst/>
-        </p:spPr>
-        <p:style>
-          <a:lnRef idx="1">
-            <a:schemeClr val="accent1"/>
-          </a:lnRef>
-          <a:fillRef idx="3">
-            <a:schemeClr val="accent1"/>
-          </a:fillRef>
-          <a:effectRef idx="2">
-            <a:schemeClr val="accent1"/>
-          </a:effectRef>
-          <a:fontRef idx="minor">
-            <a:schemeClr val="lt1"/>
-          </a:fontRef>
-        </p:style>
-        <p:txBody>
-          <a:bodyPr rtlCol="0" anchor="ctr"/>
-          <a:lstStyle/>
-          <a:p>
-            <a:endParaRPr/>
-          </a:p>
-        </p:txBody>
-      </p:sp>
-      <p:sp>
-        <p:nvSpPr>
-          <p:cNvPr id="29" name="Rectangle 28"/>
-          <p:cNvSpPr/>
-          <p:nvPr/>
-        </p:nvSpPr>
-        <p:spPr>
-          <a:xfrm>
-            <a:off x="6199632" y="4572000"/>
-            <a:ext cx="45720" cy="1261872"/>
-          </a:xfrm>
-          <a:prstGeom prst="rect">
-            <a:avLst/>
-          </a:prstGeom>
-          <a:solidFill>
-            <a:srgbClr val="4338CA"/>
-          </a:solidFill>
-          <a:ln>
-            <a:noFill/>
-          </a:ln>
-          <a:effectLst/>
-        </p:spPr>
-        <p:style>
-          <a:lnRef idx="1">
-            <a:schemeClr val="accent1"/>
-          </a:lnRef>
-          <a:fillRef idx="3">
-            <a:schemeClr val="accent1"/>
-          </a:fillRef>
-          <a:effectRef idx="2">
-            <a:schemeClr val="accent1"/>
-          </a:effectRef>
-          <a:fontRef idx="minor">
-            <a:schemeClr val="lt1"/>
-          </a:fontRef>
-        </p:style>
-        <p:txBody>
-          <a:bodyPr rtlCol="0" anchor="ctr"/>
-          <a:lstStyle/>
-          <a:p>
-            <a:endParaRPr/>
-          </a:p>
-        </p:txBody>
-      </p:sp>
-      <p:sp>
-        <p:nvSpPr>
-          <p:cNvPr id="30" name="TextBox 29"/>
-          <p:cNvSpPr txBox="1"/>
-          <p:nvPr/>
-        </p:nvSpPr>
-        <p:spPr>
-          <a:xfrm>
-            <a:off x="6455664" y="4754880"/>
-            <a:ext cx="4754880" cy="365760"/>
-          </a:xfrm>
-          <a:prstGeom prst="rect">
-            <a:avLst/>
-          </a:prstGeom>
-          <a:noFill/>
-        </p:spPr>
-        <p:txBody>
-          <a:bodyPr wrap="square" lIns="0" tIns="0" rIns="0" bIns="0">
-            <a:spAutoFit/>
-          </a:bodyPr>
-          <a:lstStyle/>
-          <a:p>
-            <a:pPr algn="l">
-              <a:lnSpc>
-                <a:spcPct val="125000"/>
-              </a:lnSpc>
-              <a:spcAft>
-                <a:spcPts val="0"/>
-              </a:spcAft>
-            </a:pPr>
-            <a:r>
-              <a:rPr sz="1200" b="1">
-                <a:solidFill>
-                  <a:srgbClr val="21252D"/>
-                </a:solidFill>
-                <a:latin typeface="Helvetica Neue"/>
-              </a:rPr>
-              <a:t>¿Qué pasa si migrate falla a la mitad de la cola?</a:t>
-            </a:r>
-          </a:p>
-        </p:txBody>
-      </p:sp>
-      <p:sp>
-        <p:nvSpPr>
-          <p:cNvPr id="31" name="TextBox 30"/>
-          <p:cNvSpPr txBox="1"/>
-          <p:nvPr/>
-        </p:nvSpPr>
-        <p:spPr>
-          <a:xfrm>
-            <a:off x="6455664" y="5138928"/>
-            <a:ext cx="4754880" cy="640080"/>
-          </a:xfrm>
-          <a:prstGeom prst="rect">
-            <a:avLst/>
-          </a:prstGeom>
-          <a:noFill/>
-        </p:spPr>
-        <p:txBody>
-          <a:bodyPr wrap="square" lIns="0" tIns="0" rIns="0" bIns="0">
-            <a:spAutoFit/>
-          </a:bodyPr>
-          <a:lstStyle/>
-          <a:p>
-            <a:pPr algn="l">
-              <a:lnSpc>
-                <a:spcPct val="138000"/>
-              </a:lnSpc>
-              <a:spcAft>
-                <a:spcPts val="0"/>
-              </a:spcAft>
-            </a:pPr>
-            <a:r>
-              <a:rPr sz="1050" b="0">
-                <a:solidFill>
-                  <a:srgbClr val="6E747E"/>
-                </a:solidFill>
-                <a:latin typeface="Helvetica Neue"/>
-              </a:rPr>
-              <a:t>Se aplican las migraciones anteriores y se detiene en la que falla. El step flyway info con if: always() muestra exactamente hasta dónde llegó.</a:t>
-            </a:r>
-          </a:p>
-        </p:txBody>
-      </p:sp>
-    </p:spTree>
-  </p:cSld>
-  <p:clrMapOvr>
-    <a:masterClrMapping/>
-  </p:clrMapOvr>
-</p:sld>
-</file>
-
-<file path=ppt/slides/slide15.xml><?xml version="1.0" encoding="utf-8"?>
-<p:sld xmlns:a="http://schemas.openxmlformats.org/drawingml/2006/main" xmlns:r="http://schemas.openxmlformats.org/officeDocument/2006/relationships" xmlns:p="http://schemas.openxmlformats.org/presentationml/2006/main">
-  <p:cSld>
-    <p:bg>
-      <p:bgPr>
-        <a:solidFill>
-          <a:srgbClr val="F8F8F6"/>
-        </a:solidFill>
-        <a:effectLst/>
-      </p:bgPr>
-    </p:bg>
-    <p:spTree>
-      <p:nvGrpSpPr>
-        <p:cNvPr id="1" name=""/>
-        <p:cNvGrpSpPr/>
-        <p:nvPr/>
-      </p:nvGrpSpPr>
-      <p:grpSpPr>
-        <a:xfrm>
-          <a:off x="0" y="0"/>
-          <a:ext cx="0" cy="0"/>
-          <a:chOff x="0" y="0"/>
-          <a:chExt cx="0" cy="0"/>
-        </a:xfrm>
-      </p:grpSpPr>
-      <p:sp>
-        <p:nvSpPr>
-          <p:cNvPr id="2" name="Rectangle 1"/>
-          <p:cNvSpPr/>
-          <p:nvPr/>
-        </p:nvSpPr>
-        <p:spPr>
-          <a:xfrm>
-            <a:off x="0" y="0"/>
-            <a:ext cx="12191695" cy="109728"/>
-          </a:xfrm>
-          <a:prstGeom prst="rect">
-            <a:avLst/>
-          </a:prstGeom>
-          <a:solidFill>
-            <a:srgbClr val="4338CA"/>
-          </a:solidFill>
-          <a:ln>
-            <a:noFill/>
-          </a:ln>
-          <a:effectLst/>
-        </p:spPr>
-        <p:style>
-          <a:lnRef idx="1">
-            <a:schemeClr val="accent1"/>
-          </a:lnRef>
-          <a:fillRef idx="3">
-            <a:schemeClr val="accent1"/>
-          </a:fillRef>
-          <a:effectRef idx="2">
-            <a:schemeClr val="accent1"/>
-          </a:effectRef>
-          <a:fontRef idx="minor">
-            <a:schemeClr val="lt1"/>
-          </a:fontRef>
-        </p:style>
-        <p:txBody>
-          <a:bodyPr rtlCol="0" anchor="ctr"/>
-          <a:lstStyle/>
-          <a:p>
-            <a:endParaRPr/>
-          </a:p>
-        </p:txBody>
-      </p:sp>
-      <p:sp>
-        <p:nvSpPr>
-          <p:cNvPr id="3" name="TextBox 2"/>
-          <p:cNvSpPr txBox="1"/>
-          <p:nvPr/>
-        </p:nvSpPr>
-        <p:spPr>
-          <a:xfrm>
-            <a:off x="731520" y="1280160"/>
-            <a:ext cx="10728655" cy="274320"/>
-          </a:xfrm>
-          <a:prstGeom prst="rect">
-            <a:avLst/>
-          </a:prstGeom>
-          <a:noFill/>
-        </p:spPr>
-        <p:txBody>
-          <a:bodyPr wrap="square" lIns="0" tIns="0" rIns="0" bIns="0">
-            <a:spAutoFit/>
-          </a:bodyPr>
-          <a:lstStyle/>
-          <a:p>
-            <a:pPr algn="ctr">
-              <a:lnSpc>
-                <a:spcPct val="110000"/>
-              </a:lnSpc>
-              <a:spcAft>
-                <a:spcPts val="0"/>
-              </a:spcAft>
-            </a:pPr>
-            <a:r>
-              <a:rPr sz="1100" b="1">
-                <a:solidFill>
-                  <a:srgbClr val="4338CA"/>
-                </a:solidFill>
-                <a:latin typeface="Helvetica Neue"/>
-              </a:rPr>
-              <a:t>REPOSITORIO</a:t>
-            </a:r>
-          </a:p>
-        </p:txBody>
-      </p:sp>
-      <p:sp>
-        <p:nvSpPr>
-          <p:cNvPr id="4" name="TextBox 3"/>
-          <p:cNvSpPr txBox="1"/>
-          <p:nvPr/>
-        </p:nvSpPr>
-        <p:spPr>
-          <a:xfrm>
-            <a:off x="731520" y="1645920"/>
-            <a:ext cx="10728655" cy="548640"/>
-          </a:xfrm>
-          <a:prstGeom prst="rect">
-            <a:avLst/>
-          </a:prstGeom>
-          <a:noFill/>
-        </p:spPr>
-        <p:txBody>
-          <a:bodyPr wrap="square" lIns="0" tIns="0" rIns="0" bIns="0">
-            <a:spAutoFit/>
-          </a:bodyPr>
-          <a:lstStyle/>
-          <a:p>
-            <a:pPr algn="ctr">
-              <a:lnSpc>
-                <a:spcPct val="110000"/>
-              </a:lnSpc>
-              <a:spcAft>
-                <a:spcPts val="0"/>
-              </a:spcAft>
-            </a:pPr>
-            <a:r>
-              <a:rPr sz="3200" b="1">
-                <a:solidFill>
-                  <a:srgbClr val="21252D"/>
-                </a:solidFill>
-                <a:latin typeface="Menlo"/>
-              </a:rPr>
-              <a:t>github.com/acarmonag/cicd-bd</a:t>
-            </a:r>
-          </a:p>
-        </p:txBody>
-      </p:sp>
-      <p:sp>
-        <p:nvSpPr>
-          <p:cNvPr id="5" name="Rectangle 4"/>
-          <p:cNvSpPr/>
-          <p:nvPr/>
-        </p:nvSpPr>
-        <p:spPr>
-          <a:xfrm>
-            <a:off x="710031" y="2697480"/>
-            <a:ext cx="2514600" cy="1143000"/>
-          </a:xfrm>
-          <a:prstGeom prst="rect">
-            <a:avLst/>
-          </a:prstGeom>
-          <a:solidFill>
-            <a:srgbClr val="FFFFFF"/>
-          </a:solidFill>
-          <a:ln w="12700">
-            <a:solidFill>
-              <a:srgbClr val="E3E2DC"/>
-            </a:solidFill>
-          </a:ln>
-          <a:effectLst/>
-        </p:spPr>
-        <p:style>
-          <a:lnRef idx="1">
-            <a:schemeClr val="accent1"/>
-          </a:lnRef>
-          <a:fillRef idx="3">
-            <a:schemeClr val="accent1"/>
-          </a:fillRef>
-          <a:effectRef idx="2">
-            <a:schemeClr val="accent1"/>
-          </a:effectRef>
-          <a:fontRef idx="minor">
-            <a:schemeClr val="lt1"/>
-          </a:fontRef>
-        </p:style>
-        <p:txBody>
-          <a:bodyPr rtlCol="0" anchor="ctr"/>
-          <a:lstStyle/>
-          <a:p>
-            <a:endParaRPr/>
-          </a:p>
-        </p:txBody>
-      </p:sp>
-      <p:sp>
-        <p:nvSpPr>
-          <p:cNvPr id="6" name="TextBox 5"/>
-          <p:cNvSpPr txBox="1"/>
-          <p:nvPr/>
-        </p:nvSpPr>
-        <p:spPr>
-          <a:xfrm>
-            <a:off x="710031" y="2971800"/>
-            <a:ext cx="2514600" cy="320040"/>
-          </a:xfrm>
-          <a:prstGeom prst="rect">
-            <a:avLst/>
-          </a:prstGeom>
-          <a:noFill/>
-        </p:spPr>
-        <p:txBody>
-          <a:bodyPr wrap="square" lIns="0" tIns="0" rIns="0" bIns="0">
-            <a:spAutoFit/>
-          </a:bodyPr>
-          <a:lstStyle/>
-          <a:p>
-            <a:pPr algn="ctr">
-              <a:lnSpc>
-                <a:spcPct val="110000"/>
-              </a:lnSpc>
-              <a:spcAft>
-                <a:spcPts val="0"/>
-              </a:spcAft>
-            </a:pPr>
-            <a:r>
-              <a:rPr sz="1700" b="1">
-                <a:solidFill>
-                  <a:srgbClr val="4338CA"/>
-                </a:solidFill>
-                <a:latin typeface="Helvetica Neue"/>
-              </a:rPr>
-              <a:t>8 tablas</a:t>
-            </a:r>
-          </a:p>
-        </p:txBody>
-      </p:sp>
-      <p:sp>
-        <p:nvSpPr>
-          <p:cNvPr id="7" name="TextBox 6"/>
-          <p:cNvSpPr txBox="1"/>
-          <p:nvPr/>
-        </p:nvSpPr>
-        <p:spPr>
-          <a:xfrm>
-            <a:off x="847191" y="3346704"/>
-            <a:ext cx="2240280" cy="320040"/>
-          </a:xfrm>
-          <a:prstGeom prst="rect">
-            <a:avLst/>
-          </a:prstGeom>
-          <a:noFill/>
-        </p:spPr>
-        <p:txBody>
-          <a:bodyPr wrap="square" lIns="0" tIns="0" rIns="0" bIns="0">
-            <a:spAutoFit/>
-          </a:bodyPr>
-          <a:lstStyle/>
-          <a:p>
-            <a:pPr algn="ctr">
-              <a:lnSpc>
-                <a:spcPct val="125000"/>
-              </a:lnSpc>
-              <a:spcAft>
-                <a:spcPts val="0"/>
-              </a:spcAft>
-            </a:pPr>
-            <a:r>
-              <a:rPr sz="1050" b="0">
-                <a:solidFill>
-                  <a:srgbClr val="6E747E"/>
-                </a:solidFill>
-                <a:latin typeface="Helvetica Neue"/>
-              </a:rPr>
-              <a:t>modelo propio de torneos</a:t>
-            </a:r>
-          </a:p>
-        </p:txBody>
-      </p:sp>
-      <p:sp>
-        <p:nvSpPr>
-          <p:cNvPr id="8" name="Rectangle 7"/>
-          <p:cNvSpPr/>
-          <p:nvPr/>
-        </p:nvSpPr>
-        <p:spPr>
-          <a:xfrm>
-            <a:off x="3462375" y="2697480"/>
-            <a:ext cx="2514600" cy="1143000"/>
-          </a:xfrm>
-          <a:prstGeom prst="rect">
-            <a:avLst/>
-          </a:prstGeom>
-          <a:solidFill>
-            <a:srgbClr val="FFFFFF"/>
-          </a:solidFill>
-          <a:ln w="12700">
-            <a:solidFill>
-              <a:srgbClr val="E3E2DC"/>
-            </a:solidFill>
-          </a:ln>
-          <a:effectLst/>
-        </p:spPr>
-        <p:style>
-          <a:lnRef idx="1">
-            <a:schemeClr val="accent1"/>
-          </a:lnRef>
-          <a:fillRef idx="3">
-            <a:schemeClr val="accent1"/>
-          </a:fillRef>
-          <a:effectRef idx="2">
-            <a:schemeClr val="accent1"/>
-          </a:effectRef>
-          <a:fontRef idx="minor">
-            <a:schemeClr val="lt1"/>
-          </a:fontRef>
-        </p:style>
-        <p:txBody>
-          <a:bodyPr rtlCol="0" anchor="ctr"/>
-          <a:lstStyle/>
-          <a:p>
-            <a:endParaRPr/>
-          </a:p>
-        </p:txBody>
-      </p:sp>
-      <p:sp>
-        <p:nvSpPr>
-          <p:cNvPr id="9" name="TextBox 8"/>
-          <p:cNvSpPr txBox="1"/>
-          <p:nvPr/>
-        </p:nvSpPr>
-        <p:spPr>
-          <a:xfrm>
-            <a:off x="3462375" y="2971800"/>
-            <a:ext cx="2514600" cy="320040"/>
-          </a:xfrm>
-          <a:prstGeom prst="rect">
-            <a:avLst/>
-          </a:prstGeom>
-          <a:noFill/>
-        </p:spPr>
-        <p:txBody>
-          <a:bodyPr wrap="square" lIns="0" tIns="0" rIns="0" bIns="0">
-            <a:spAutoFit/>
-          </a:bodyPr>
-          <a:lstStyle/>
-          <a:p>
-            <a:pPr algn="ctr">
-              <a:lnSpc>
-                <a:spcPct val="110000"/>
-              </a:lnSpc>
-              <a:spcAft>
-                <a:spcPts val="0"/>
-              </a:spcAft>
-            </a:pPr>
-            <a:r>
-              <a:rPr sz="1700" b="1">
-                <a:solidFill>
-                  <a:srgbClr val="4338CA"/>
-                </a:solidFill>
-                <a:latin typeface="Helvetica Neue"/>
-              </a:rPr>
-              <a:t>7 migraciones</a:t>
-            </a:r>
-          </a:p>
-        </p:txBody>
-      </p:sp>
-      <p:sp>
-        <p:nvSpPr>
-          <p:cNvPr id="10" name="TextBox 9"/>
-          <p:cNvSpPr txBox="1"/>
-          <p:nvPr/>
-        </p:nvSpPr>
-        <p:spPr>
-          <a:xfrm>
-            <a:off x="3599535" y="3346704"/>
-            <a:ext cx="2240280" cy="320040"/>
-          </a:xfrm>
-          <a:prstGeom prst="rect">
-            <a:avLst/>
-          </a:prstGeom>
-          <a:noFill/>
-        </p:spPr>
-        <p:txBody>
-          <a:bodyPr wrap="square" lIns="0" tIns="0" rIns="0" bIns="0">
-            <a:spAutoFit/>
-          </a:bodyPr>
-          <a:lstStyle/>
-          <a:p>
-            <a:pPr algn="ctr">
-              <a:lnSpc>
-                <a:spcPct val="125000"/>
-              </a:lnSpc>
-              <a:spcAft>
-                <a:spcPts val="0"/>
-              </a:spcAft>
-            </a:pPr>
-            <a:r>
-              <a:rPr sz="1050" b="0">
-                <a:solidFill>
-                  <a:srgbClr val="6E747E"/>
-                </a:solidFill>
-                <a:latin typeface="Helvetica Neue"/>
-              </a:rPr>
-              <a:t>6 versionadas  +  1 repetible</a:t>
-            </a:r>
-          </a:p>
-        </p:txBody>
-      </p:sp>
-      <p:sp>
-        <p:nvSpPr>
-          <p:cNvPr id="11" name="Rectangle 10"/>
-          <p:cNvSpPr/>
-          <p:nvPr/>
-        </p:nvSpPr>
-        <p:spPr>
-          <a:xfrm>
-            <a:off x="6214719" y="2697480"/>
-            <a:ext cx="2514600" cy="1143000"/>
-          </a:xfrm>
-          <a:prstGeom prst="rect">
-            <a:avLst/>
-          </a:prstGeom>
-          <a:solidFill>
-            <a:srgbClr val="FFFFFF"/>
-          </a:solidFill>
-          <a:ln w="12700">
-            <a:solidFill>
-              <a:srgbClr val="E3E2DC"/>
-            </a:solidFill>
-          </a:ln>
-          <a:effectLst/>
-        </p:spPr>
-        <p:style>
-          <a:lnRef idx="1">
-            <a:schemeClr val="accent1"/>
-          </a:lnRef>
-          <a:fillRef idx="3">
-            <a:schemeClr val="accent1"/>
-          </a:fillRef>
-          <a:effectRef idx="2">
-            <a:schemeClr val="accent1"/>
-          </a:effectRef>
-          <a:fontRef idx="minor">
-            <a:schemeClr val="lt1"/>
-          </a:fontRef>
-        </p:style>
-        <p:txBody>
-          <a:bodyPr rtlCol="0" anchor="ctr"/>
-          <a:lstStyle/>
-          <a:p>
-            <a:endParaRPr/>
-          </a:p>
-        </p:txBody>
-      </p:sp>
-      <p:sp>
-        <p:nvSpPr>
-          <p:cNvPr id="12" name="TextBox 11"/>
-          <p:cNvSpPr txBox="1"/>
-          <p:nvPr/>
-        </p:nvSpPr>
-        <p:spPr>
-          <a:xfrm>
-            <a:off x="6214719" y="2971800"/>
-            <a:ext cx="2514600" cy="320040"/>
-          </a:xfrm>
-          <a:prstGeom prst="rect">
-            <a:avLst/>
-          </a:prstGeom>
-          <a:noFill/>
-        </p:spPr>
-        <p:txBody>
-          <a:bodyPr wrap="square" lIns="0" tIns="0" rIns="0" bIns="0">
-            <a:spAutoFit/>
-          </a:bodyPr>
-          <a:lstStyle/>
-          <a:p>
-            <a:pPr algn="ctr">
-              <a:lnSpc>
-                <a:spcPct val="110000"/>
-              </a:lnSpc>
-              <a:spcAft>
-                <a:spcPts val="0"/>
-              </a:spcAft>
-            </a:pPr>
-            <a:r>
-              <a:rPr sz="1700" b="1">
-                <a:solidFill>
-                  <a:srgbClr val="4338CA"/>
-                </a:solidFill>
-                <a:latin typeface="Helvetica Neue"/>
-              </a:rPr>
-              <a:t>Pipeline dual</a:t>
-            </a:r>
-          </a:p>
-        </p:txBody>
-      </p:sp>
-      <p:sp>
-        <p:nvSpPr>
-          <p:cNvPr id="13" name="TextBox 12"/>
-          <p:cNvSpPr txBox="1"/>
-          <p:nvPr/>
-        </p:nvSpPr>
-        <p:spPr>
-          <a:xfrm>
-            <a:off x="6351879" y="3346704"/>
-            <a:ext cx="2240280" cy="320040"/>
-          </a:xfrm>
-          <a:prstGeom prst="rect">
-            <a:avLst/>
-          </a:prstGeom>
-          <a:noFill/>
-        </p:spPr>
-        <p:txBody>
-          <a:bodyPr wrap="square" lIns="0" tIns="0" rIns="0" bIns="0">
-            <a:spAutoFit/>
-          </a:bodyPr>
-          <a:lstStyle/>
-          <a:p>
-            <a:pPr algn="ctr">
-              <a:lnSpc>
-                <a:spcPct val="125000"/>
-              </a:lnSpc>
-              <a:spcAft>
-                <a:spcPts val="0"/>
-              </a:spcAft>
-            </a:pPr>
-            <a:r>
-              <a:rPr sz="1050" b="0">
-                <a:solidFill>
-                  <a:srgbClr val="6E747E"/>
-                </a:solidFill>
-                <a:latin typeface="Helvetica Neue"/>
-              </a:rPr>
               <a:t>PR → dev   ·   merge → prod</a:t>
-            </a:r>
-          </a:p>
-        </p:txBody>
-      </p:sp>
-      <p:sp>
-        <p:nvSpPr>
-          <p:cNvPr id="14" name="Rectangle 13"/>
-          <p:cNvSpPr/>
-          <p:nvPr/>
-        </p:nvSpPr>
-        <p:spPr>
-          <a:xfrm>
-            <a:off x="8967063" y="2697480"/>
-            <a:ext cx="2514600" cy="1143000"/>
-          </a:xfrm>
-          <a:prstGeom prst="rect">
-            <a:avLst/>
-          </a:prstGeom>
-          <a:solidFill>
-            <a:srgbClr val="FFFFFF"/>
-          </a:solidFill>
-          <a:ln w="12700">
-            <a:solidFill>
-              <a:srgbClr val="E3E2DC"/>
-            </a:solidFill>
-          </a:ln>
-          <a:effectLst/>
-        </p:spPr>
-        <p:style>
-          <a:lnRef idx="1">
-            <a:schemeClr val="accent1"/>
-          </a:lnRef>
-          <a:fillRef idx="3">
-            <a:schemeClr val="accent1"/>
-          </a:fillRef>
-          <a:effectRef idx="2">
-            <a:schemeClr val="accent1"/>
-          </a:effectRef>
-          <a:fontRef idx="minor">
-            <a:schemeClr val="lt1"/>
-          </a:fontRef>
-        </p:style>
-        <p:txBody>
-          <a:bodyPr rtlCol="0" anchor="ctr"/>
-          <a:lstStyle/>
-          <a:p>
-            <a:endParaRPr/>
-          </a:p>
-        </p:txBody>
-      </p:sp>
-      <p:sp>
-        <p:nvSpPr>
-          <p:cNvPr id="15" name="TextBox 14"/>
-          <p:cNvSpPr txBox="1"/>
-          <p:nvPr/>
-        </p:nvSpPr>
-        <p:spPr>
-          <a:xfrm>
-            <a:off x="8967063" y="2971800"/>
-            <a:ext cx="2514600" cy="320040"/>
-          </a:xfrm>
-          <a:prstGeom prst="rect">
-            <a:avLst/>
-          </a:prstGeom>
-          <a:noFill/>
-        </p:spPr>
-        <p:txBody>
-          <a:bodyPr wrap="square" lIns="0" tIns="0" rIns="0" bIns="0">
-            <a:spAutoFit/>
-          </a:bodyPr>
-          <a:lstStyle/>
-          <a:p>
-            <a:pPr algn="ctr">
-              <a:lnSpc>
-                <a:spcPct val="110000"/>
-              </a:lnSpc>
-              <a:spcAft>
-                <a:spcPts val="0"/>
-              </a:spcAft>
-            </a:pPr>
-            <a:r>
-              <a:rPr sz="1700" b="1">
-                <a:solidFill>
-                  <a:srgbClr val="4338CA"/>
-                </a:solidFill>
-                <a:latin typeface="Helvetica Neue"/>
-              </a:rPr>
-              <a:t>Cero secretos</a:t>
-            </a:r>
-          </a:p>
-        </p:txBody>
-      </p:sp>
-      <p:sp>
-        <p:nvSpPr>
-          <p:cNvPr id="16" name="TextBox 15"/>
-          <p:cNvSpPr txBox="1"/>
-          <p:nvPr/>
-        </p:nvSpPr>
-        <p:spPr>
-          <a:xfrm>
-            <a:off x="9104223" y="3346704"/>
-            <a:ext cx="2240280" cy="320040"/>
-          </a:xfrm>
-          <a:prstGeom prst="rect">
-            <a:avLst/>
-          </a:prstGeom>
-          <a:noFill/>
-        </p:spPr>
-        <p:txBody>
-          <a:bodyPr wrap="square" lIns="0" tIns="0" rIns="0" bIns="0">
-            <a:spAutoFit/>
-          </a:bodyPr>
-          <a:lstStyle/>
-          <a:p>
-            <a:pPr algn="ctr">
-              <a:lnSpc>
-                <a:spcPct val="125000"/>
-              </a:lnSpc>
-              <a:spcAft>
-                <a:spcPts val="0"/>
-              </a:spcAft>
-            </a:pPr>
-            <a:r>
-              <a:rPr sz="1050" b="0">
-                <a:solidFill>
-                  <a:srgbClr val="6E747E"/>
-                </a:solidFill>
-                <a:latin typeface="Helvetica Neue"/>
-              </a:rPr>
-              <a:t>en el repositorio</a:t>
             </a:r>
           </a:p>
         </p:txBody>
